--- a/vault/blogs/2026-04-30-vercel-ai-sdk-6-vs-claude-agent-sdk/slides.pptx
+++ b/vault/blogs/2026-04-30-vercel-ai-sdk-6-vs-claude-agent-sdk/slides.pptx
@@ -3882,7 +3882,7 @@
                   <a:srgbClr val="FFFFFF"/>
                 </a:solidFill>
               </a:rPr>
-              <a:t>  AI SDK 6 is a [[glossary/agent-harness]] — it abstracts the loop control flow, not the compute. You still own and operat</a:t>
+              <a:t>  AI SDK 6 is an agent harness — it abstracts the loop control flow, not the compute. You still own and operat</a:t>
             </a:r>
           </a:p>
         </p:txBody>
